--- a/docs/slides/pptx/M5_UI시안제작.pptx
+++ b/docs/slides/pptx/M5_UI시안제작.pptx
@@ -3148,7 +3148,7 @@
           </a:fontRef>
         </p:style>
         <p:txBody>
-          <a:bodyPr rtlCol="0" anchor="ctr"/>
+          <a:bodyPr rtlCol="0" anchor="t" wrap="square"/>
           <a:lstStyle/>
           <a:p>
             <a:pPr algn="ctr"/>
@@ -3192,7 +3192,7 @@
           </a:fontRef>
         </p:style>
         <p:txBody>
-          <a:bodyPr rtlCol="0" anchor="ctr"/>
+          <a:bodyPr rtlCol="0" anchor="t" wrap="square"/>
           <a:lstStyle/>
           <a:p>
             <a:pPr algn="ctr"/>
@@ -3236,7 +3236,7 @@
           </a:fontRef>
         </p:style>
         <p:txBody>
-          <a:bodyPr rtlCol="0" anchor="ctr"/>
+          <a:bodyPr rtlCol="0" anchor="t" wrap="square"/>
           <a:lstStyle/>
           <a:p>
             <a:pPr algn="ctr"/>
@@ -3280,7 +3280,7 @@
           </a:fontRef>
         </p:style>
         <p:txBody>
-          <a:bodyPr rtlCol="0" anchor="ctr"/>
+          <a:bodyPr rtlCol="0" anchor="t" wrap="square"/>
           <a:lstStyle/>
           <a:p>
             <a:pPr algn="ctr"/>
@@ -3324,7 +3324,7 @@
           </a:fontRef>
         </p:style>
         <p:txBody>
-          <a:bodyPr rtlCol="0" anchor="ctr"/>
+          <a:bodyPr rtlCol="0" anchor="t" wrap="square"/>
           <a:lstStyle/>
           <a:p>
             <a:pPr algn="ctr"/>
@@ -3368,7 +3368,7 @@
           </a:fontRef>
         </p:style>
         <p:txBody>
-          <a:bodyPr rtlCol="0" anchor="ctr"/>
+          <a:bodyPr rtlCol="0" anchor="t" wrap="square"/>
           <a:lstStyle/>
           <a:p>
             <a:pPr algn="ctr"/>
@@ -3412,7 +3412,7 @@
           </a:fontRef>
         </p:style>
         <p:txBody>
-          <a:bodyPr rtlCol="0" anchor="ctr"/>
+          <a:bodyPr rtlCol="0" anchor="t" wrap="square"/>
           <a:lstStyle/>
           <a:p>
             <a:pPr algn="ctr"/>
@@ -3624,7 +3624,7 @@
           </a:fontRef>
         </p:style>
         <p:txBody>
-          <a:bodyPr rtlCol="0" anchor="ctr"/>
+          <a:bodyPr rtlCol="0" anchor="t" wrap="square"/>
           <a:lstStyle/>
           <a:p>
             <a:pPr algn="ctr"/>
@@ -3926,7 +3926,7 @@
           </a:fontRef>
         </p:style>
         <p:txBody>
-          <a:bodyPr rtlCol="0" anchor="ctr"/>
+          <a:bodyPr rtlCol="0" anchor="t" wrap="square"/>
           <a:lstStyle/>
           <a:p>
             <a:pPr algn="ctr"/>
@@ -4230,7 +4230,7 @@
           </a:fontRef>
         </p:style>
         <p:txBody>
-          <a:bodyPr rtlCol="0" anchor="ctr"/>
+          <a:bodyPr rtlCol="0" anchor="t" wrap="square"/>
           <a:lstStyle/>
           <a:p>
             <a:pPr algn="ctr"/>
@@ -4345,10 +4345,10 @@
           </a:fontRef>
         </p:style>
         <p:txBody>
-          <a:bodyPr rtlCol="0" anchor="ctr" wrap="square" lIns="411480" rIns="365760" tIns="502920" bIns="320040"/>
-          <a:lstStyle/>
-          <a:p>
-            <a:pPr algn="ctr">
+          <a:bodyPr rtlCol="0" anchor="t" wrap="square" lIns="411480" rIns="365760" tIns="502920" bIns="320040"/>
+          <a:lstStyle/>
+          <a:p>
+            <a:pPr algn="l">
               <a:lnSpc>
                 <a:spcPct val="115000"/>
               </a:lnSpc>
@@ -4372,7 +4372,7 @@
             </a:r>
           </a:p>
           <a:p>
-            <a:pPr>
+            <a:pPr algn="l">
               <a:lnSpc>
                 <a:spcPct val="115000"/>
               </a:lnSpc>
@@ -4396,7 +4396,7 @@
             </a:r>
           </a:p>
           <a:p>
-            <a:pPr>
+            <a:pPr algn="l">
               <a:lnSpc>
                 <a:spcPct val="115000"/>
               </a:lnSpc>
@@ -4420,7 +4420,7 @@
             </a:r>
           </a:p>
           <a:p>
-            <a:pPr>
+            <a:pPr algn="l">
               <a:lnSpc>
                 <a:spcPct val="115000"/>
               </a:lnSpc>
@@ -4482,7 +4482,7 @@
           </a:fontRef>
         </p:style>
         <p:txBody>
-          <a:bodyPr rtlCol="0" anchor="ctr"/>
+          <a:bodyPr rtlCol="0" anchor="t" wrap="square"/>
           <a:lstStyle/>
           <a:p>
             <a:pPr algn="ctr"/>
@@ -4552,7 +4552,7 @@
           </a:fontRef>
         </p:style>
         <p:txBody>
-          <a:bodyPr rtlCol="0" anchor="ctr"/>
+          <a:bodyPr rtlCol="0" anchor="t" wrap="square"/>
           <a:lstStyle/>
           <a:p>
             <a:pPr algn="ctr"/>
@@ -4667,7 +4667,7 @@
           </a:fontRef>
         </p:style>
         <p:txBody>
-          <a:bodyPr rtlCol="0" anchor="ctr" wrap="square" lIns="365760" rIns="365760" tIns="228600" bIns="182880"/>
+          <a:bodyPr rtlCol="0" anchor="t" wrap="square" lIns="365760" rIns="365760" tIns="228600" bIns="182880"/>
           <a:lstStyle/>
           <a:p>
             <a:pPr algn="l">
@@ -4802,7 +4802,7 @@
           </a:fontRef>
         </p:style>
         <p:txBody>
-          <a:bodyPr rtlCol="0" anchor="ctr" wrap="square" lIns="365760" rIns="365760" tIns="201168" bIns="182880"/>
+          <a:bodyPr rtlCol="0" anchor="t" wrap="square" lIns="365760" rIns="365760" tIns="201168" bIns="182880"/>
           <a:lstStyle/>
           <a:p>
             <a:pPr algn="l">
@@ -4904,7 +4904,7 @@
           </a:fontRef>
         </p:style>
         <p:txBody>
-          <a:bodyPr rtlCol="0" anchor="ctr"/>
+          <a:bodyPr rtlCol="0" anchor="t" wrap="square"/>
           <a:lstStyle/>
           <a:p>
             <a:pPr algn="ctr"/>
@@ -5160,7 +5160,7 @@
           </a:fontRef>
         </p:style>
         <p:txBody>
-          <a:bodyPr rtlCol="0" anchor="ctr"/>
+          <a:bodyPr rtlCol="0" anchor="t" wrap="square"/>
           <a:lstStyle/>
           <a:p>
             <a:pPr algn="ctr"/>
@@ -5429,7 +5429,7 @@
           </a:fontRef>
         </p:style>
         <p:txBody>
-          <a:bodyPr rtlCol="0" anchor="ctr"/>
+          <a:bodyPr rtlCol="0" anchor="t" wrap="square"/>
           <a:lstStyle/>
           <a:p>
             <a:pPr algn="ctr"/>
@@ -5629,7 +5629,7 @@
           </a:fontRef>
         </p:style>
         <p:txBody>
-          <a:bodyPr rtlCol="0" anchor="ctr"/>
+          <a:bodyPr rtlCol="0" anchor="t" wrap="square"/>
           <a:lstStyle/>
           <a:p>
             <a:pPr algn="ctr"/>
@@ -5863,7 +5863,7 @@
           </a:fontRef>
         </p:style>
         <p:txBody>
-          <a:bodyPr rtlCol="0" anchor="ctr"/>
+          <a:bodyPr rtlCol="0" anchor="t" wrap="square"/>
           <a:lstStyle/>
           <a:p>
             <a:pPr algn="ctr"/>
@@ -6097,7 +6097,7 @@
           </a:fontRef>
         </p:style>
         <p:txBody>
-          <a:bodyPr rtlCol="0" anchor="ctr"/>
+          <a:bodyPr rtlCol="0" anchor="t" wrap="square"/>
           <a:lstStyle/>
           <a:p>
             <a:pPr algn="ctr"/>
@@ -6262,7 +6262,7 @@
           </a:fontRef>
         </p:style>
         <p:txBody>
-          <a:bodyPr rtlCol="0" anchor="ctr"/>
+          <a:bodyPr rtlCol="0" anchor="t" wrap="square"/>
           <a:lstStyle/>
           <a:p>
             <a:pPr algn="ctr"/>
@@ -6564,7 +6564,7 @@
           </a:fontRef>
         </p:style>
         <p:txBody>
-          <a:bodyPr rtlCol="0" anchor="ctr"/>
+          <a:bodyPr rtlCol="0" anchor="t" wrap="square"/>
           <a:lstStyle/>
           <a:p>
             <a:pPr algn="ctr"/>
@@ -6868,7 +6868,7 @@
           </a:fontRef>
         </p:style>
         <p:txBody>
-          <a:bodyPr rtlCol="0" anchor="ctr"/>
+          <a:bodyPr rtlCol="0" anchor="t" wrap="square"/>
           <a:lstStyle/>
           <a:p>
             <a:pPr algn="ctr"/>
@@ -6983,10 +6983,10 @@
           </a:fontRef>
         </p:style>
         <p:txBody>
-          <a:bodyPr rtlCol="0" anchor="ctr" wrap="square" lIns="411480" rIns="365760" tIns="502920" bIns="320040"/>
-          <a:lstStyle/>
-          <a:p>
-            <a:pPr algn="ctr">
+          <a:bodyPr rtlCol="0" anchor="t" wrap="square" lIns="411480" rIns="365760" tIns="502920" bIns="320040"/>
+          <a:lstStyle/>
+          <a:p>
+            <a:pPr algn="l">
               <a:lnSpc>
                 <a:spcPct val="115000"/>
               </a:lnSpc>
@@ -7010,7 +7010,7 @@
             </a:r>
           </a:p>
           <a:p>
-            <a:pPr>
+            <a:pPr algn="l">
               <a:lnSpc>
                 <a:spcPct val="115000"/>
               </a:lnSpc>
@@ -7034,7 +7034,7 @@
             </a:r>
           </a:p>
           <a:p>
-            <a:pPr>
+            <a:pPr algn="l">
               <a:lnSpc>
                 <a:spcPct val="115000"/>
               </a:lnSpc>
@@ -7058,7 +7058,7 @@
             </a:r>
           </a:p>
           <a:p>
-            <a:pPr>
+            <a:pPr algn="l">
               <a:lnSpc>
                 <a:spcPct val="115000"/>
               </a:lnSpc>
@@ -7082,7 +7082,7 @@
             </a:r>
           </a:p>
           <a:p>
-            <a:pPr>
+            <a:pPr algn="l">
               <a:lnSpc>
                 <a:spcPct val="115000"/>
               </a:lnSpc>
@@ -7106,7 +7106,7 @@
             </a:r>
           </a:p>
           <a:p>
-            <a:pPr>
+            <a:pPr algn="l">
               <a:lnSpc>
                 <a:spcPct val="115000"/>
               </a:lnSpc>
@@ -7168,7 +7168,7 @@
           </a:fontRef>
         </p:style>
         <p:txBody>
-          <a:bodyPr rtlCol="0" anchor="ctr"/>
+          <a:bodyPr rtlCol="0" anchor="t" wrap="square"/>
           <a:lstStyle/>
           <a:p>
             <a:pPr algn="ctr"/>
@@ -7238,7 +7238,7 @@
           </a:fontRef>
         </p:style>
         <p:txBody>
-          <a:bodyPr rtlCol="0" anchor="ctr"/>
+          <a:bodyPr rtlCol="0" anchor="t" wrap="square"/>
           <a:lstStyle/>
           <a:p>
             <a:pPr algn="ctr"/>
@@ -7353,7 +7353,7 @@
           </a:fontRef>
         </p:style>
         <p:txBody>
-          <a:bodyPr rtlCol="0" anchor="ctr" wrap="square" lIns="365760" rIns="365760" tIns="228600" bIns="182880"/>
+          <a:bodyPr rtlCol="0" anchor="t" wrap="square" lIns="365760" rIns="365760" tIns="228600" bIns="182880"/>
           <a:lstStyle/>
           <a:p>
             <a:pPr algn="l">
@@ -7488,7 +7488,7 @@
           </a:fontRef>
         </p:style>
         <p:txBody>
-          <a:bodyPr rtlCol="0" anchor="ctr" wrap="square" lIns="365760" rIns="365760" tIns="201168" bIns="182880"/>
+          <a:bodyPr rtlCol="0" anchor="t" wrap="square" lIns="365760" rIns="365760" tIns="201168" bIns="182880"/>
           <a:lstStyle/>
           <a:p>
             <a:pPr algn="l">
@@ -7590,7 +7590,7 @@
           </a:fontRef>
         </p:style>
         <p:txBody>
-          <a:bodyPr rtlCol="0" anchor="ctr"/>
+          <a:bodyPr rtlCol="0" anchor="t" wrap="square"/>
           <a:lstStyle/>
           <a:p>
             <a:pPr algn="ctr"/>
